--- a/Reporte010426.pptx
+++ b/Reporte010426.pptx
@@ -6173,10 +6173,10 @@
       </p:sp>
       <p:pic>
         <p:nvPicPr>
-          <p:cNvPr id="4" name="Imagen 3">
+          <p:cNvPr id="3" name="Imagen 2">
             <a:extLst>
               <a:ext uri="{FF2B5EF4-FFF2-40B4-BE49-F238E27FC236}">
-                <a16:creationId xmlns:a16="http://schemas.microsoft.com/office/drawing/2014/main" id="{41AA7500-44E0-268B-BC8B-8F1D4A651465}"/>
+                <a16:creationId xmlns:a16="http://schemas.microsoft.com/office/drawing/2014/main" id="{CD027F35-3A48-6256-BC58-7E83FD96E661}"/>
               </a:ext>
             </a:extLst>
           </p:cNvPr>
@@ -6193,8 +6193,8 @@
         </p:blipFill>
         <p:spPr>
           <a:xfrm>
-            <a:off x="0" y="1260736"/>
-            <a:ext cx="9144000" cy="2622027"/>
+            <a:off x="0" y="1230022"/>
+            <a:ext cx="9144000" cy="2683455"/>
           </a:xfrm>
           <a:prstGeom prst="rect">
             <a:avLst/>
@@ -6271,10 +6271,10 @@
       </p:sp>
       <p:pic>
         <p:nvPicPr>
-          <p:cNvPr id="3" name="Imagen 2">
+          <p:cNvPr id="4" name="Imagen 3">
             <a:extLst>
               <a:ext uri="{FF2B5EF4-FFF2-40B4-BE49-F238E27FC236}">
-                <a16:creationId xmlns:a16="http://schemas.microsoft.com/office/drawing/2014/main" id="{1A455441-7BC6-C3B8-3125-C17E21513F8F}"/>
+                <a16:creationId xmlns:a16="http://schemas.microsoft.com/office/drawing/2014/main" id="{0D5BBB63-1AD2-B0DA-36EC-FD2C9649A63B}"/>
               </a:ext>
             </a:extLst>
           </p:cNvPr>
@@ -6291,8 +6291,8 @@
         </p:blipFill>
         <p:spPr>
           <a:xfrm>
-            <a:off x="0" y="1352550"/>
-            <a:ext cx="9144000" cy="2438400"/>
+            <a:off x="0" y="1392535"/>
+            <a:ext cx="9144000" cy="2358430"/>
           </a:xfrm>
           <a:prstGeom prst="rect">
             <a:avLst/>
@@ -6375,49 +6375,32 @@
       </p:sp>
       <p:pic>
         <p:nvPicPr>
-          <p:cNvPr id="1026" name="Picture 2">
+          <p:cNvPr id="3" name="Imagen 2">
             <a:extLst>
               <a:ext uri="{FF2B5EF4-FFF2-40B4-BE49-F238E27FC236}">
-                <a16:creationId xmlns:a16="http://schemas.microsoft.com/office/drawing/2014/main" id="{F4C5F821-CF57-EE65-8267-FA897311E749}"/>
+                <a16:creationId xmlns:a16="http://schemas.microsoft.com/office/drawing/2014/main" id="{7F9FC4D5-ACC1-2E78-F350-8EA7173A6A51}"/>
               </a:ext>
             </a:extLst>
           </p:cNvPr>
           <p:cNvPicPr>
-            <a:picLocks noChangeAspect="1" noChangeArrowheads="1"/>
+            <a:picLocks noChangeAspect="1"/>
           </p:cNvPicPr>
           <p:nvPr/>
         </p:nvPicPr>
         <p:blipFill>
-          <a:blip r:embed="rId2">
-            <a:extLst>
-              <a:ext uri="{28A0092B-C50C-407E-A947-70E740481C1C}">
-                <a14:useLocalDpi xmlns:a14="http://schemas.microsoft.com/office/drawing/2010/main" val="0"/>
-              </a:ext>
-            </a:extLst>
-          </a:blip>
-          <a:srcRect/>
+          <a:blip r:embed="rId2"/>
           <a:stretch>
             <a:fillRect/>
           </a:stretch>
         </p:blipFill>
-        <p:spPr bwMode="auto">
+        <p:spPr>
           <a:xfrm>
-            <a:off x="2038350" y="666750"/>
-            <a:ext cx="5067300" cy="3810000"/>
+            <a:off x="0" y="775196"/>
+            <a:ext cx="9144000" cy="3593108"/>
           </a:xfrm>
           <a:prstGeom prst="rect">
             <a:avLst/>
           </a:prstGeom>
-          <a:noFill/>
-          <a:extLst>
-            <a:ext uri="{909E8E84-426E-40DD-AFC4-6F175D3DCCD1}">
-              <a14:hiddenFill xmlns:a14="http://schemas.microsoft.com/office/drawing/2010/main">
-                <a:solidFill>
-                  <a:srgbClr val="FFFFFF"/>
-                </a:solidFill>
-              </a14:hiddenFill>
-            </a:ext>
-          </a:extLst>
         </p:spPr>
       </p:pic>
     </p:spTree>
@@ -6495,10 +6478,10 @@
       </p:sp>
       <p:pic>
         <p:nvPicPr>
-          <p:cNvPr id="4" name="Imagen 3">
+          <p:cNvPr id="3" name="Imagen 2">
             <a:extLst>
               <a:ext uri="{FF2B5EF4-FFF2-40B4-BE49-F238E27FC236}">
-                <a16:creationId xmlns:a16="http://schemas.microsoft.com/office/drawing/2014/main" id="{1B50A895-F131-76FA-FB79-8E0130024F3C}"/>
+                <a16:creationId xmlns:a16="http://schemas.microsoft.com/office/drawing/2014/main" id="{E76C2AE5-6278-2571-E9B9-B47ECDDEEB37}"/>
               </a:ext>
             </a:extLst>
           </p:cNvPr>
@@ -6515,8 +6498,8 @@
         </p:blipFill>
         <p:spPr>
           <a:xfrm>
-            <a:off x="641014" y="338554"/>
-            <a:ext cx="7788947" cy="4699985"/>
+            <a:off x="980574" y="1238064"/>
+            <a:ext cx="7182852" cy="2667372"/>
           </a:xfrm>
           <a:prstGeom prst="rect">
             <a:avLst/>
@@ -7093,10 +7076,10 @@
       </p:sp>
       <p:pic>
         <p:nvPicPr>
-          <p:cNvPr id="5" name="Imagen 4">
+          <p:cNvPr id="7" name="Imagen 6">
             <a:extLst>
               <a:ext uri="{FF2B5EF4-FFF2-40B4-BE49-F238E27FC236}">
-                <a16:creationId xmlns:a16="http://schemas.microsoft.com/office/drawing/2014/main" id="{D0FB9E83-ACC5-6D98-4680-F9D7EA009A56}"/>
+                <a16:creationId xmlns:a16="http://schemas.microsoft.com/office/drawing/2014/main" id="{25EB97D1-0406-82D5-AB0C-F106718C1792}"/>
               </a:ext>
             </a:extLst>
           </p:cNvPr>
@@ -7113,8 +7096,8 @@
         </p:blipFill>
         <p:spPr>
           <a:xfrm>
-            <a:off x="0" y="368071"/>
-            <a:ext cx="9144000" cy="4407357"/>
+            <a:off x="0" y="368923"/>
+            <a:ext cx="9144000" cy="4405654"/>
           </a:xfrm>
           <a:prstGeom prst="rect">
             <a:avLst/>
@@ -7191,10 +7174,10 @@
       </p:sp>
       <p:pic>
         <p:nvPicPr>
-          <p:cNvPr id="4" name="Imagen 3">
+          <p:cNvPr id="3" name="Imagen 2">
             <a:extLst>
               <a:ext uri="{FF2B5EF4-FFF2-40B4-BE49-F238E27FC236}">
-                <a16:creationId xmlns:a16="http://schemas.microsoft.com/office/drawing/2014/main" id="{A204A61F-1859-C8FB-CC36-A1DA09E034E5}"/>
+                <a16:creationId xmlns:a16="http://schemas.microsoft.com/office/drawing/2014/main" id="{3AFF2CA9-EA1D-3831-0E70-14EEC4AA8D42}"/>
               </a:ext>
             </a:extLst>
           </p:cNvPr>
@@ -7211,8 +7194,8 @@
         </p:blipFill>
         <p:spPr>
           <a:xfrm>
-            <a:off x="0" y="924928"/>
-            <a:ext cx="9144000" cy="3293644"/>
+            <a:off x="0" y="954854"/>
+            <a:ext cx="9144000" cy="3233792"/>
           </a:xfrm>
           <a:prstGeom prst="rect">
             <a:avLst/>
@@ -7295,10 +7278,10 @@
       </p:sp>
       <p:pic>
         <p:nvPicPr>
-          <p:cNvPr id="4" name="Imagen 3">
+          <p:cNvPr id="3" name="Imagen 2">
             <a:extLst>
               <a:ext uri="{FF2B5EF4-FFF2-40B4-BE49-F238E27FC236}">
-                <a16:creationId xmlns:a16="http://schemas.microsoft.com/office/drawing/2014/main" id="{DBC70CD2-ABFD-E2EE-B40A-CA720F4F3CA0}"/>
+                <a16:creationId xmlns:a16="http://schemas.microsoft.com/office/drawing/2014/main" id="{5663E225-0271-8539-B654-7826BA48625D}"/>
               </a:ext>
             </a:extLst>
           </p:cNvPr>
@@ -7315,8 +7298,8 @@
         </p:blipFill>
         <p:spPr>
           <a:xfrm>
-            <a:off x="0" y="737414"/>
-            <a:ext cx="9144000" cy="3668671"/>
+            <a:off x="0" y="352948"/>
+            <a:ext cx="9144000" cy="4437604"/>
           </a:xfrm>
           <a:prstGeom prst="rect">
             <a:avLst/>
@@ -7393,10 +7376,10 @@
       </p:sp>
       <p:pic>
         <p:nvPicPr>
-          <p:cNvPr id="5" name="Imagen 4">
+          <p:cNvPr id="4" name="Imagen 3">
             <a:extLst>
               <a:ext uri="{FF2B5EF4-FFF2-40B4-BE49-F238E27FC236}">
-                <a16:creationId xmlns:a16="http://schemas.microsoft.com/office/drawing/2014/main" id="{FA60A0A7-EFE0-A869-1A2E-24B7E85A8AD6}"/>
+                <a16:creationId xmlns:a16="http://schemas.microsoft.com/office/drawing/2014/main" id="{BA44FF99-E084-8536-CAC7-4677DBF1ED7E}"/>
               </a:ext>
             </a:extLst>
           </p:cNvPr>
@@ -7413,8 +7396,8 @@
         </p:blipFill>
         <p:spPr>
           <a:xfrm>
-            <a:off x="0" y="775246"/>
-            <a:ext cx="9144000" cy="3593007"/>
+            <a:off x="0" y="1087698"/>
+            <a:ext cx="9144000" cy="2968103"/>
           </a:xfrm>
           <a:prstGeom prst="rect">
             <a:avLst/>
